--- a/courses/learn_legalization/module01-01-site-row-model/slides.pptx
+++ b/courses/learn_legalization/module01-01-site-row-model/slides.pptx
@@ -16,6 +16,9 @@
     <p:sldId id="264" r:id="rId16"/>
     <p:sldId id="265" r:id="rId17"/>
     <p:sldId id="266" r:id="rId18"/>
+    <p:sldId id="267" r:id="rId19"/>
+    <p:sldId id="268" r:id="rId20"/>
+    <p:sldId id="269" r:id="rId21"/>
   </p:sldIdLst>
   <p:sldSz cx="12191695" cy="6858000" type="screen4x3"/>
   <p:notesSz cx="6858000" cy="9144000"/>
@@ -582,7 +585,7 @@
           <a:lstStyle/>
           <a:p>
             <a:r>
-              <a:t>Common traps: assuming snap alone legalizes; forgetting site width when checking overlap; ignoring fixed macro D at (8, 4); reporting HPWL without legality; and comparing Abacus and Tetris without naming displacement versus wirelength tradeoffs.</a:t>
+              <a:t>In the browser lab track, open the **site-row-model** lab from the tools shelf. Open the interactive lab, place or snap cells on the site and row grid—or use an Apply helper—then Check. Reveal golden is study-only. Work the challenges that lock the goldens, then come back to implement the same loop yourself.</a:t>
             </a:r>
           </a:p>
         </p:txBody>
@@ -652,6 +655,146 @@
           <a:lstStyle/>
           <a:p>
             <a:r>
+              <a:t>In the implement track, open this module's EXAMPLES.md Pseudocode section and the course common solvers. Parse `tiny_legal.json`, run the algorithm with deterministic coordinates, and print legality, displacement, and HPWL. Match the browser goldens before you claim the checklist.</a:t>
+            </a:r>
+          </a:p>
+        </p:txBody>
+      </p:sp>
+      <p:sp>
+        <p:nvSpPr>
+          <p:cNvPr id="4" name="Slide Number Placeholder 3"/>
+          <p:cNvSpPr>
+            <a:spLocks noGrp="1"/>
+          </p:cNvSpPr>
+          <p:nvPr>
+            <p:ph type="sldNum" idx="5" sz="quarter"/>
+          </p:nvPr>
+        </p:nvSpPr>
+        <p:spPr/>
+      </p:sp>
+    </p:spTree>
+  </p:cSld>
+  <p:clrMapOvr>
+    <a:masterClrMapping/>
+  </p:clrMapOvr>
+</p:notes>
+</file>
+
+<file path=ppt/notesSlides/notesSlide12.xml><?xml version="1.0" encoding="utf-8"?>
+<p:notes xmlns:a="http://schemas.openxmlformats.org/drawingml/2006/main" xmlns:p="http://schemas.openxmlformats.org/presentationml/2006/main" xmlns:r="http://schemas.openxmlformats.org/officeDocument/2006/relationships">
+  <p:cSld>
+    <p:spTree>
+      <p:nvGrpSpPr>
+        <p:cNvPr id="1" name=""/>
+        <p:cNvGrpSpPr/>
+        <p:nvPr/>
+      </p:nvGrpSpPr>
+      <p:grpSpPr>
+        <a:xfrm>
+          <a:off x="0" y="0"/>
+          <a:ext cx="0" cy="0"/>
+          <a:chOff x="0" y="0"/>
+          <a:chExt cx="0" cy="0"/>
+        </a:xfrm>
+      </p:grpSpPr>
+      <p:sp>
+        <p:nvSpPr>
+          <p:cNvPr id="2" name="Slide Image Placeholder 1"/>
+          <p:cNvSpPr>
+            <a:spLocks noGrp="1"/>
+          </p:cNvSpPr>
+          <p:nvPr>
+            <p:ph type="sldImg" idx="2"/>
+          </p:nvPr>
+        </p:nvSpPr>
+        <p:spPr/>
+      </p:sp>
+      <p:sp>
+        <p:nvSpPr>
+          <p:cNvPr id="3" name="Notes Placeholder 2"/>
+          <p:cNvSpPr>
+            <a:spLocks noGrp="1"/>
+          </p:cNvSpPr>
+          <p:nvPr>
+            <p:ph type="body" idx="3" sz="quarter"/>
+          </p:nvPr>
+        </p:nvSpPr>
+        <p:spPr/>
+        <p:txBody>
+          <a:bodyPr/>
+          <a:lstStyle/>
+          <a:p>
+            <a:r>
+              <a:t>Common traps: assuming snap alone legalizes; forgetting site width when checking overlap; ignoring fixed macro D at (8, 4); reporting HPWL without legality; and comparing Abacus and Tetris without naming displacement versus wirelength tradeoffs.</a:t>
+            </a:r>
+          </a:p>
+        </p:txBody>
+      </p:sp>
+      <p:sp>
+        <p:nvSpPr>
+          <p:cNvPr id="4" name="Slide Number Placeholder 3"/>
+          <p:cNvSpPr>
+            <a:spLocks noGrp="1"/>
+          </p:cNvSpPr>
+          <p:nvPr>
+            <p:ph type="sldNum" idx="5" sz="quarter"/>
+          </p:nvPr>
+        </p:nvSpPr>
+        <p:spPr/>
+      </p:sp>
+    </p:spTree>
+  </p:cSld>
+  <p:clrMapOvr>
+    <a:masterClrMapping/>
+  </p:clrMapOvr>
+</p:notes>
+</file>
+
+<file path=ppt/notesSlides/notesSlide13.xml><?xml version="1.0" encoding="utf-8"?>
+<p:notes xmlns:a="http://schemas.openxmlformats.org/drawingml/2006/main" xmlns:p="http://schemas.openxmlformats.org/presentationml/2006/main" xmlns:r="http://schemas.openxmlformats.org/officeDocument/2006/relationships">
+  <p:cSld>
+    <p:spTree>
+      <p:nvGrpSpPr>
+        <p:cNvPr id="1" name=""/>
+        <p:cNvGrpSpPr/>
+        <p:nvPr/>
+      </p:nvGrpSpPr>
+      <p:grpSpPr>
+        <a:xfrm>
+          <a:off x="0" y="0"/>
+          <a:ext cx="0" cy="0"/>
+          <a:chOff x="0" y="0"/>
+          <a:chExt cx="0" cy="0"/>
+        </a:xfrm>
+      </p:grpSpPr>
+      <p:sp>
+        <p:nvSpPr>
+          <p:cNvPr id="2" name="Slide Image Placeholder 1"/>
+          <p:cNvSpPr>
+            <a:spLocks noGrp="1"/>
+          </p:cNvSpPr>
+          <p:nvPr>
+            <p:ph type="sldImg" idx="2"/>
+          </p:nvPr>
+        </p:nvSpPr>
+        <p:spPr/>
+      </p:sp>
+      <p:sp>
+        <p:nvSpPr>
+          <p:cNvPr id="3" name="Notes Placeholder 2"/>
+          <p:cNvSpPr>
+            <a:spLocks noGrp="1"/>
+          </p:cNvSpPr>
+          <p:nvPr>
+            <p:ph type="body" idx="3" sz="quarter"/>
+          </p:nvPr>
+        </p:nvSpPr>
+        <p:spPr/>
+        <p:txBody>
+          <a:bodyPr/>
+          <a:lstStyle/>
+          <a:p>
+            <a:r>
               <a:t>Complete the checklist for at least one track—preferably both. Implement until your metrics match the starter goldens. When you're ready, take the short quiz, then continue to the next module.</a:t>
             </a:r>
           </a:p>
@@ -725,12 +868,6 @@
               <a:t>Every cell sits on exactly one row with a lower-left coordinate aligned to site pitch one. Width tells you how many consecutive sites the rectangle covers. The golden packing is legal; the overlap seed stacks A, B, and C at (4, 2) to show what illegal looks like.</a:t>
             </a:r>
           </a:p>
-          <a:p/>
-          <a:p>
-            <a:r>
-              <a:t>&lt;!-- algorithm-walkthrough --&gt;</a:t>
-            </a:r>
-          </a:p>
         </p:txBody>
       </p:sp>
       <p:sp>
@@ -798,7 +935,13 @@
           <a:lstStyle/>
           <a:p>
             <a:r>
-              <a:t>Legalization lives on a discrete canvas: chip width twelve sites, height six (three rows of height two). Row bottoms sit at y equals zero, two, and four. Every movable cell must land on a row and align to site pitch one.</a:t>
+              <a:t>Pseudocode is the written sketch of the algorithm before you code it. For this module the sketch is the site and row model itself: inputs are chip size, site pitch, row bottoms, and cell widths. Outputs are the rules every legal packing must obey.</a:t>
+            </a:r>
+          </a:p>
+          <a:p/>
+          <a:p>
+            <a:r>
+              <a:t>Open this module's examples file and find the Pseudocode section. That written sketch is what you implement on the implement track and what the browser challenges measure.</a:t>
             </a:r>
           </a:p>
         </p:txBody>
@@ -868,7 +1011,7 @@
           <a:lstStyle/>
           <a:p>
             <a:r>
-              <a:t>Six cells A through F occupy ten sites total—two sites each for A–D and one each for E and F. Width drives how many consecutive sites a rectangle spans when you pack a row.</a:t>
+              <a:t>Read the sketch as a contract. Every cell lower-left sits on a site and a row bottom. Width tells how many consecutive sites the rectangle covers. Our teaching chip is twelve by six with three rows—that is the instance every later lab shares.</a:t>
             </a:r>
           </a:p>
         </p:txBody>
@@ -938,7 +1081,7 @@
           <a:lstStyle/>
           <a:p>
             <a:r>
-              <a:t>Each vertical tick is one site. Legal x coordinates are integers; a width-two cell at x equals four covers sites four and five on its row. The golden packing shows legal site alignment.</a:t>
+              <a:t>Legalization lives on a discrete canvas: chip width twelve sites, height six (three rows of height two). Row bottoms sit at y equals zero, two, and four. Every movable cell must land on a row and align to site pitch one.</a:t>
             </a:r>
           </a:p>
         </p:txBody>
@@ -1008,7 +1151,7 @@
           <a:lstStyle/>
           <a:p>
             <a:r>
-              <a:t>The reference legal layout spreads A and B on row zero, C on row one, and E plus D on row top. No overlap, every cell on-row and site-aligned—this is the teaching golden.</a:t>
+              <a:t>Six cells A through F occupy ten sites total—two sites each for A–D and one each for E and F. Width drives how many consecutive sites a rectangle spans when you pack a row.</a:t>
             </a:r>
           </a:p>
         </p:txBody>
@@ -1078,13 +1221,7 @@
           <a:lstStyle/>
           <a:p>
             <a:r>
-              <a:t>The overlap seed stacks A, B, and C at (4, 2) on the middle row—same width-two cells fighting for the same sites. Legality fails before you even discuss wirelength.</a:t>
-            </a:r>
-          </a:p>
-          <a:p/>
-          <a:p>
-            <a:r>
-              <a:t>&lt;!-- /algorithm-walkthrough --&gt;</a:t>
+              <a:t>Each vertical tick is one site. Legal x coordinates are integers; a width-two cell at x equals four covers sites four and five on its row. The golden packing shows legal site alignment.</a:t>
             </a:r>
           </a:p>
         </p:txBody>
@@ -1154,7 +1291,7 @@
           <a:lstStyle/>
           <a:p>
             <a:r>
-              <a:t>In the browser lab track, open the **site-row-model** lab from the tools shelf. Load the overlap or float starter, run the legalizer once, and read legality plus displacement and HPWL when the panel shows them. Work the challenges that lock the goldens, then come back to implement the same loop yourself.</a:t>
+              <a:t>The reference legal layout spreads A and B on row zero, C on row one, and E plus D on row top. No overlap, every cell on-row and site-aligned—this is the teaching golden.</a:t>
             </a:r>
           </a:p>
         </p:txBody>
@@ -1224,7 +1361,7 @@
           <a:lstStyle/>
           <a:p>
             <a:r>
-              <a:t>In the implement track, open this module's examples and the course `common/` solvers. Parse `tiny_legal.json`, run the algorithm with deterministic coordinates, and print legality, displacement, and HPWL. Match the browser goldens before you claim the checklist.</a:t>
+              <a:t>The overlap seed stacks A, B, and C at (4, 2) on the middle row—same width-two cells fighting for the same sites. Legality fails before you even discuss wirelength.</a:t>
             </a:r>
           </a:p>
         </p:txBody>
@@ -4382,21 +4519,45 @@
                 </a:solidFill>
                 <a:latin typeface="Calibri"/>
               </a:rPr>
-              <a:t>Pitfalls</a:t>
-            </a:r>
-          </a:p>
-        </p:txBody>
-      </p:sp>
-      <p:sp>
-        <p:nvSpPr>
-          <p:cNvPr id="3" name="TextBox 2"/>
+              <a:t>Contrast: illegal overlap stack</a:t>
+            </a:r>
+          </a:p>
+        </p:txBody>
+      </p:sp>
+      <p:pic>
+        <p:nvPicPr>
+          <p:cNvPr id="3" name="Picture 2" descr="05-overlap-contrast.png"/>
+          <p:cNvPicPr>
+            <a:picLocks noChangeAspect="1"/>
+          </p:cNvPicPr>
+          <p:nvPr/>
+        </p:nvPicPr>
+        <p:blipFill>
+          <a:blip r:embed="rId2"/>
+          <a:stretch>
+            <a:fillRect/>
+          </a:stretch>
+        </p:blipFill>
+        <p:spPr>
+          <a:xfrm>
+            <a:off x="548640" y="1143000"/>
+            <a:ext cx="9404113" cy="4572000"/>
+          </a:xfrm>
+          <a:prstGeom prst="rect">
+            <a:avLst/>
+          </a:prstGeom>
+        </p:spPr>
+      </p:pic>
+      <p:sp>
+        <p:nvSpPr>
+          <p:cNvPr id="4" name="TextBox 3"/>
           <p:cNvSpPr txBox="1"/>
           <p:nvPr/>
         </p:nvSpPr>
         <p:spPr>
           <a:xfrm>
-            <a:off x="548640" y="1234440"/>
-            <a:ext cx="11064240" cy="4937760"/>
+            <a:off x="548640" y="5897880"/>
+            <a:ext cx="11064240" cy="411480"/>
           </a:xfrm>
           <a:prstGeom prst="rect">
             <a:avLst/>
@@ -4409,32 +4570,26 @@
           </a:bodyPr>
           <a:lstStyle/>
           <a:p>
-            <a:pPr lvl="0" marL="457200" indent="-228600">
-              <a:buFont typeface="Calibri"/>
-              <a:spcAft>
-                <a:spcPts val="1000"/>
-              </a:spcAft>
-              <a:buSzPct val="100000"/>
-              <a:buChar char="•"/>
+            <a:pPr>
               <a:lnSpc>
                 <a:spcPts val="2200"/>
               </a:lnSpc>
             </a:pPr>
             <a:r>
-              <a:rPr sz="2000" b="0">
+              <a:rPr sz="1200" b="0">
                 <a:solidFill>
                   <a:srgbClr val="333333"/>
                 </a:solidFill>
                 <a:latin typeface="Calibri"/>
               </a:rPr>
-              <a:t>Common traps</a:t>
-            </a:r>
-          </a:p>
-        </p:txBody>
-      </p:sp>
-      <p:sp>
-        <p:nvSpPr>
-          <p:cNvPr id="4" name="TextBox 3"/>
+              <a:t>Contrast: illegal overlap stack</a:t>
+            </a:r>
+          </a:p>
+        </p:txBody>
+      </p:sp>
+      <p:sp>
+        <p:nvSpPr>
+          <p:cNvPr id="5" name="TextBox 4"/>
           <p:cNvSpPr txBox="1"/>
           <p:nvPr/>
         </p:nvSpPr>
@@ -4523,6 +4678,557 @@
                 </a:solidFill>
                 <a:latin typeface="Calibri"/>
               </a:rPr>
+              <a:t>Browser lab track</a:t>
+            </a:r>
+          </a:p>
+        </p:txBody>
+      </p:sp>
+      <p:sp>
+        <p:nvSpPr>
+          <p:cNvPr id="3" name="TextBox 2"/>
+          <p:cNvSpPr txBox="1"/>
+          <p:nvPr/>
+        </p:nvSpPr>
+        <p:spPr>
+          <a:xfrm>
+            <a:off x="548640" y="1234440"/>
+            <a:ext cx="11064240" cy="4937760"/>
+          </a:xfrm>
+          <a:prstGeom prst="rect">
+            <a:avLst/>
+          </a:prstGeom>
+          <a:noFill/>
+        </p:spPr>
+        <p:txBody>
+          <a:bodyPr wrap="square">
+            <a:noAutofit/>
+          </a:bodyPr>
+          <a:lstStyle/>
+          <a:p>
+            <a:pPr lvl="0" marL="457200" indent="-228600">
+              <a:buFont typeface="Calibri"/>
+              <a:spcAft>
+                <a:spcPts val="1000"/>
+              </a:spcAft>
+              <a:buSzPct val="100000"/>
+              <a:buChar char="•"/>
+              <a:lnSpc>
+                <a:spcPts val="2200"/>
+              </a:lnSpc>
+            </a:pPr>
+            <a:r>
+              <a:rPr sz="2000" b="0">
+                <a:solidFill>
+                  <a:srgbClr val="333333"/>
+                </a:solidFill>
+                <a:latin typeface="Calibri"/>
+              </a:rPr>
+              <a:t>In the browser lab track, open the </a:t>
+            </a:r>
+            <a:r>
+              <a:rPr sz="2000" b="1">
+                <a:solidFill>
+                  <a:srgbClr val="333333"/>
+                </a:solidFill>
+                <a:latin typeface="Calibri"/>
+              </a:rPr>
+              <a:t>site-row-model</a:t>
+            </a:r>
+            <a:r>
+              <a:rPr sz="2000" b="0">
+                <a:solidFill>
+                  <a:srgbClr val="333333"/>
+                </a:solidFill>
+                <a:latin typeface="Calibri"/>
+              </a:rPr>
+              <a:t> lab from the tools shelf</a:t>
+            </a:r>
+          </a:p>
+          <a:p>
+            <a:pPr lvl="0" marL="457200" indent="-228600">
+              <a:buFont typeface="Calibri"/>
+              <a:spcAft>
+                <a:spcPts val="1000"/>
+              </a:spcAft>
+              <a:buSzPct val="100000"/>
+              <a:buChar char="•"/>
+              <a:lnSpc>
+                <a:spcPts val="2200"/>
+              </a:lnSpc>
+            </a:pPr>
+            <a:r>
+              <a:rPr sz="2000" b="0">
+                <a:solidFill>
+                  <a:srgbClr val="333333"/>
+                </a:solidFill>
+                <a:latin typeface="Calibri"/>
+              </a:rPr>
+              <a:t>Open the interactive lab</a:t>
+            </a:r>
+          </a:p>
+          <a:p>
+            <a:pPr lvl="0" marL="457200" indent="-228600">
+              <a:buFont typeface="Calibri"/>
+              <a:spcAft>
+                <a:spcPts val="1000"/>
+              </a:spcAft>
+              <a:buSzPct val="100000"/>
+              <a:buChar char="•"/>
+              <a:lnSpc>
+                <a:spcPts val="2200"/>
+              </a:lnSpc>
+            </a:pPr>
+            <a:r>
+              <a:rPr sz="2000" b="0">
+                <a:solidFill>
+                  <a:srgbClr val="333333"/>
+                </a:solidFill>
+                <a:latin typeface="Calibri"/>
+              </a:rPr>
+              <a:t>Reveal golden is study-only</a:t>
+            </a:r>
+          </a:p>
+          <a:p>
+            <a:pPr lvl="0" marL="457200" indent="-228600">
+              <a:buFont typeface="Calibri"/>
+              <a:spcAft>
+                <a:spcPts val="1000"/>
+              </a:spcAft>
+              <a:buSzPct val="100000"/>
+              <a:buChar char="•"/>
+              <a:lnSpc>
+                <a:spcPts val="2200"/>
+              </a:lnSpc>
+            </a:pPr>
+            <a:r>
+              <a:rPr sz="2000" b="0">
+                <a:solidFill>
+                  <a:srgbClr val="333333"/>
+                </a:solidFill>
+                <a:latin typeface="Calibri"/>
+              </a:rPr>
+              <a:t>Work the challenges that lock the goldens</a:t>
+            </a:r>
+          </a:p>
+        </p:txBody>
+      </p:sp>
+      <p:sp>
+        <p:nvSpPr>
+          <p:cNvPr id="4" name="TextBox 3"/>
+          <p:cNvSpPr txBox="1"/>
+          <p:nvPr/>
+        </p:nvSpPr>
+        <p:spPr>
+          <a:xfrm>
+            <a:off x="548640" y="6355080"/>
+            <a:ext cx="11064240" cy="320040"/>
+          </a:xfrm>
+          <a:prstGeom prst="rect">
+            <a:avLst/>
+          </a:prstGeom>
+          <a:noFill/>
+        </p:spPr>
+        <p:txBody>
+          <a:bodyPr wrap="square">
+            <a:noAutofit/>
+          </a:bodyPr>
+          <a:lstStyle/>
+          <a:p>
+            <a:pPr algn="r">
+              <a:lnSpc>
+                <a:spcPts val="2200"/>
+              </a:lnSpc>
+              <a:defRPr sz="1000" b="0">
+                <a:solidFill>
+                  <a:srgbClr val="666666"/>
+                </a:solidFill>
+                <a:latin typeface="Calibri"/>
+              </a:defRPr>
+            </a:pPr>
+            <a:r>
+              <a:t>learn_legalization — 01 site row model</a:t>
+            </a:r>
+          </a:p>
+        </p:txBody>
+      </p:sp>
+    </p:spTree>
+  </p:cSld>
+  <p:clrMapOvr>
+    <a:masterClrMapping/>
+  </p:clrMapOvr>
+</p:sld>
+</file>
+
+<file path=ppt/slides/slide12.xml><?xml version="1.0" encoding="utf-8"?>
+<p:sld xmlns:a="http://schemas.openxmlformats.org/drawingml/2006/main" xmlns:p="http://schemas.openxmlformats.org/presentationml/2006/main" xmlns:r="http://schemas.openxmlformats.org/officeDocument/2006/relationships">
+  <p:cSld>
+    <p:spTree>
+      <p:nvGrpSpPr>
+        <p:cNvPr id="1" name=""/>
+        <p:cNvGrpSpPr/>
+        <p:nvPr/>
+      </p:nvGrpSpPr>
+      <p:grpSpPr/>
+      <p:sp>
+        <p:nvSpPr>
+          <p:cNvPr id="2" name="TextBox 1"/>
+          <p:cNvSpPr txBox="1"/>
+          <p:nvPr/>
+        </p:nvSpPr>
+        <p:spPr>
+          <a:xfrm>
+            <a:off x="548640" y="411480"/>
+            <a:ext cx="11064240" cy="777240"/>
+          </a:xfrm>
+          <a:prstGeom prst="rect">
+            <a:avLst/>
+          </a:prstGeom>
+          <a:noFill/>
+        </p:spPr>
+        <p:txBody>
+          <a:bodyPr wrap="square">
+            <a:noAutofit/>
+          </a:bodyPr>
+          <a:lstStyle/>
+          <a:p>
+            <a:pPr>
+              <a:lnSpc>
+                <a:spcPts val="2200"/>
+              </a:lnSpc>
+            </a:pPr>
+            <a:r>
+              <a:rPr sz="2800" b="1">
+                <a:solidFill>
+                  <a:srgbClr val="1A1A2E"/>
+                </a:solidFill>
+                <a:latin typeface="Calibri"/>
+              </a:rPr>
+              <a:t>Implement track</a:t>
+            </a:r>
+          </a:p>
+        </p:txBody>
+      </p:sp>
+      <p:sp>
+        <p:nvSpPr>
+          <p:cNvPr id="3" name="TextBox 2"/>
+          <p:cNvSpPr txBox="1"/>
+          <p:nvPr/>
+        </p:nvSpPr>
+        <p:spPr>
+          <a:xfrm>
+            <a:off x="548640" y="1234440"/>
+            <a:ext cx="11064240" cy="4937760"/>
+          </a:xfrm>
+          <a:prstGeom prst="rect">
+            <a:avLst/>
+          </a:prstGeom>
+          <a:noFill/>
+        </p:spPr>
+        <p:txBody>
+          <a:bodyPr wrap="square">
+            <a:noAutofit/>
+          </a:bodyPr>
+          <a:lstStyle/>
+          <a:p>
+            <a:pPr lvl="0" marL="457200" indent="-228600">
+              <a:buFont typeface="Calibri"/>
+              <a:spcAft>
+                <a:spcPts val="1000"/>
+              </a:spcAft>
+              <a:buSzPct val="100000"/>
+              <a:buChar char="•"/>
+              <a:lnSpc>
+                <a:spcPts val="2200"/>
+              </a:lnSpc>
+            </a:pPr>
+            <a:r>
+              <a:rPr sz="2000" b="0">
+                <a:solidFill>
+                  <a:srgbClr val="333333"/>
+                </a:solidFill>
+                <a:latin typeface="Calibri"/>
+              </a:rPr>
+              <a:t>In the implement track</a:t>
+            </a:r>
+          </a:p>
+          <a:p>
+            <a:pPr lvl="0" marL="457200" indent="-228600">
+              <a:buFont typeface="Calibri"/>
+              <a:spcAft>
+                <a:spcPts val="1000"/>
+              </a:spcAft>
+              <a:buSzPct val="100000"/>
+              <a:buChar char="•"/>
+              <a:lnSpc>
+                <a:spcPts val="2200"/>
+              </a:lnSpc>
+            </a:pPr>
+            <a:r>
+              <a:rPr sz="2000" b="0">
+                <a:solidFill>
+                  <a:srgbClr val="333333"/>
+                </a:solidFill>
+                <a:latin typeface="Calibri"/>
+              </a:rPr>
+              <a:t>Parse `tiny_legal.json`, run the algorithm with deterministic coordinates</a:t>
+            </a:r>
+          </a:p>
+          <a:p>
+            <a:pPr lvl="0" marL="457200" indent="-228600">
+              <a:buFont typeface="Calibri"/>
+              <a:spcAft>
+                <a:spcPts val="1000"/>
+              </a:spcAft>
+              <a:buSzPct val="100000"/>
+              <a:buChar char="•"/>
+              <a:lnSpc>
+                <a:spcPts val="2200"/>
+              </a:lnSpc>
+            </a:pPr>
+            <a:r>
+              <a:rPr sz="2000" b="0">
+                <a:solidFill>
+                  <a:srgbClr val="333333"/>
+                </a:solidFill>
+                <a:latin typeface="Calibri"/>
+              </a:rPr>
+              <a:t>Match the browser goldens before you claim the checklist</a:t>
+            </a:r>
+          </a:p>
+        </p:txBody>
+      </p:sp>
+      <p:sp>
+        <p:nvSpPr>
+          <p:cNvPr id="4" name="TextBox 3"/>
+          <p:cNvSpPr txBox="1"/>
+          <p:nvPr/>
+        </p:nvSpPr>
+        <p:spPr>
+          <a:xfrm>
+            <a:off x="548640" y="6355080"/>
+            <a:ext cx="11064240" cy="320040"/>
+          </a:xfrm>
+          <a:prstGeom prst="rect">
+            <a:avLst/>
+          </a:prstGeom>
+          <a:noFill/>
+        </p:spPr>
+        <p:txBody>
+          <a:bodyPr wrap="square">
+            <a:noAutofit/>
+          </a:bodyPr>
+          <a:lstStyle/>
+          <a:p>
+            <a:pPr algn="r">
+              <a:lnSpc>
+                <a:spcPts val="2200"/>
+              </a:lnSpc>
+              <a:defRPr sz="1000" b="0">
+                <a:solidFill>
+                  <a:srgbClr val="666666"/>
+                </a:solidFill>
+                <a:latin typeface="Calibri"/>
+              </a:defRPr>
+            </a:pPr>
+            <a:r>
+              <a:t>learn_legalization — 01 site row model</a:t>
+            </a:r>
+          </a:p>
+        </p:txBody>
+      </p:sp>
+    </p:spTree>
+  </p:cSld>
+  <p:clrMapOvr>
+    <a:masterClrMapping/>
+  </p:clrMapOvr>
+</p:sld>
+</file>
+
+<file path=ppt/slides/slide13.xml><?xml version="1.0" encoding="utf-8"?>
+<p:sld xmlns:a="http://schemas.openxmlformats.org/drawingml/2006/main" xmlns:p="http://schemas.openxmlformats.org/presentationml/2006/main" xmlns:r="http://schemas.openxmlformats.org/officeDocument/2006/relationships">
+  <p:cSld>
+    <p:spTree>
+      <p:nvGrpSpPr>
+        <p:cNvPr id="1" name=""/>
+        <p:cNvGrpSpPr/>
+        <p:nvPr/>
+      </p:nvGrpSpPr>
+      <p:grpSpPr/>
+      <p:sp>
+        <p:nvSpPr>
+          <p:cNvPr id="2" name="TextBox 1"/>
+          <p:cNvSpPr txBox="1"/>
+          <p:nvPr/>
+        </p:nvSpPr>
+        <p:spPr>
+          <a:xfrm>
+            <a:off x="548640" y="411480"/>
+            <a:ext cx="11064240" cy="777240"/>
+          </a:xfrm>
+          <a:prstGeom prst="rect">
+            <a:avLst/>
+          </a:prstGeom>
+          <a:noFill/>
+        </p:spPr>
+        <p:txBody>
+          <a:bodyPr wrap="square">
+            <a:noAutofit/>
+          </a:bodyPr>
+          <a:lstStyle/>
+          <a:p>
+            <a:pPr>
+              <a:lnSpc>
+                <a:spcPts val="2200"/>
+              </a:lnSpc>
+            </a:pPr>
+            <a:r>
+              <a:rPr sz="2800" b="1">
+                <a:solidFill>
+                  <a:srgbClr val="1A1A2E"/>
+                </a:solidFill>
+                <a:latin typeface="Calibri"/>
+              </a:rPr>
+              <a:t>Pitfalls</a:t>
+            </a:r>
+          </a:p>
+        </p:txBody>
+      </p:sp>
+      <p:sp>
+        <p:nvSpPr>
+          <p:cNvPr id="3" name="TextBox 2"/>
+          <p:cNvSpPr txBox="1"/>
+          <p:nvPr/>
+        </p:nvSpPr>
+        <p:spPr>
+          <a:xfrm>
+            <a:off x="548640" y="1234440"/>
+            <a:ext cx="11064240" cy="4937760"/>
+          </a:xfrm>
+          <a:prstGeom prst="rect">
+            <a:avLst/>
+          </a:prstGeom>
+          <a:noFill/>
+        </p:spPr>
+        <p:txBody>
+          <a:bodyPr wrap="square">
+            <a:noAutofit/>
+          </a:bodyPr>
+          <a:lstStyle/>
+          <a:p>
+            <a:pPr lvl="0" marL="457200" indent="-228600">
+              <a:buFont typeface="Calibri"/>
+              <a:spcAft>
+                <a:spcPts val="1000"/>
+              </a:spcAft>
+              <a:buSzPct val="100000"/>
+              <a:buChar char="•"/>
+              <a:lnSpc>
+                <a:spcPts val="2200"/>
+              </a:lnSpc>
+            </a:pPr>
+            <a:r>
+              <a:rPr sz="2000" b="0">
+                <a:solidFill>
+                  <a:srgbClr val="333333"/>
+                </a:solidFill>
+                <a:latin typeface="Calibri"/>
+              </a:rPr>
+              <a:t>Common traps</a:t>
+            </a:r>
+          </a:p>
+        </p:txBody>
+      </p:sp>
+      <p:sp>
+        <p:nvSpPr>
+          <p:cNvPr id="4" name="TextBox 3"/>
+          <p:cNvSpPr txBox="1"/>
+          <p:nvPr/>
+        </p:nvSpPr>
+        <p:spPr>
+          <a:xfrm>
+            <a:off x="548640" y="6355080"/>
+            <a:ext cx="11064240" cy="320040"/>
+          </a:xfrm>
+          <a:prstGeom prst="rect">
+            <a:avLst/>
+          </a:prstGeom>
+          <a:noFill/>
+        </p:spPr>
+        <p:txBody>
+          <a:bodyPr wrap="square">
+            <a:noAutofit/>
+          </a:bodyPr>
+          <a:lstStyle/>
+          <a:p>
+            <a:pPr algn="r">
+              <a:lnSpc>
+                <a:spcPts val="2200"/>
+              </a:lnSpc>
+              <a:defRPr sz="1000" b="0">
+                <a:solidFill>
+                  <a:srgbClr val="666666"/>
+                </a:solidFill>
+                <a:latin typeface="Calibri"/>
+              </a:defRPr>
+            </a:pPr>
+            <a:r>
+              <a:t>learn_legalization — 01 site row model</a:t>
+            </a:r>
+          </a:p>
+        </p:txBody>
+      </p:sp>
+    </p:spTree>
+  </p:cSld>
+  <p:clrMapOvr>
+    <a:masterClrMapping/>
+  </p:clrMapOvr>
+</p:sld>
+</file>
+
+<file path=ppt/slides/slide14.xml><?xml version="1.0" encoding="utf-8"?>
+<p:sld xmlns:a="http://schemas.openxmlformats.org/drawingml/2006/main" xmlns:p="http://schemas.openxmlformats.org/presentationml/2006/main" xmlns:r="http://schemas.openxmlformats.org/officeDocument/2006/relationships">
+  <p:cSld>
+    <p:spTree>
+      <p:nvGrpSpPr>
+        <p:cNvPr id="1" name=""/>
+        <p:cNvGrpSpPr/>
+        <p:nvPr/>
+      </p:nvGrpSpPr>
+      <p:grpSpPr/>
+      <p:sp>
+        <p:nvSpPr>
+          <p:cNvPr id="2" name="TextBox 1"/>
+          <p:cNvSpPr txBox="1"/>
+          <p:nvPr/>
+        </p:nvSpPr>
+        <p:spPr>
+          <a:xfrm>
+            <a:off x="548640" y="411480"/>
+            <a:ext cx="11064240" cy="777240"/>
+          </a:xfrm>
+          <a:prstGeom prst="rect">
+            <a:avLst/>
+          </a:prstGeom>
+          <a:noFill/>
+        </p:spPr>
+        <p:txBody>
+          <a:bodyPr wrap="square">
+            <a:noAutofit/>
+          </a:bodyPr>
+          <a:lstStyle/>
+          <a:p>
+            <a:pPr>
+              <a:lnSpc>
+                <a:spcPts val="2200"/>
+              </a:lnSpc>
+            </a:pPr>
+            <a:r>
+              <a:rPr sz="2800" b="1">
+                <a:solidFill>
+                  <a:srgbClr val="1A1A2E"/>
+                </a:solidFill>
+                <a:latin typeface="Calibri"/>
+              </a:rPr>
               <a:t>Your turn</a:t>
             </a:r>
           </a:p>
@@ -4800,6 +5506,125 @@
               <a:t>The golden packing is legal</a:t>
             </a:r>
           </a:p>
+        </p:txBody>
+      </p:sp>
+      <p:sp>
+        <p:nvSpPr>
+          <p:cNvPr id="4" name="TextBox 3"/>
+          <p:cNvSpPr txBox="1"/>
+          <p:nvPr/>
+        </p:nvSpPr>
+        <p:spPr>
+          <a:xfrm>
+            <a:off x="548640" y="6355080"/>
+            <a:ext cx="11064240" cy="320040"/>
+          </a:xfrm>
+          <a:prstGeom prst="rect">
+            <a:avLst/>
+          </a:prstGeom>
+          <a:noFill/>
+        </p:spPr>
+        <p:txBody>
+          <a:bodyPr wrap="square">
+            <a:noAutofit/>
+          </a:bodyPr>
+          <a:lstStyle/>
+          <a:p>
+            <a:pPr algn="r">
+              <a:lnSpc>
+                <a:spcPts val="2200"/>
+              </a:lnSpc>
+              <a:defRPr sz="1000" b="0">
+                <a:solidFill>
+                  <a:srgbClr val="666666"/>
+                </a:solidFill>
+                <a:latin typeface="Calibri"/>
+              </a:defRPr>
+            </a:pPr>
+            <a:r>
+              <a:t>learn_legalization — 01 site row model</a:t>
+            </a:r>
+          </a:p>
+        </p:txBody>
+      </p:sp>
+    </p:spTree>
+  </p:cSld>
+  <p:clrMapOvr>
+    <a:masterClrMapping/>
+  </p:clrMapOvr>
+</p:sld>
+</file>
+
+<file path=ppt/slides/slide3.xml><?xml version="1.0" encoding="utf-8"?>
+<p:sld xmlns:a="http://schemas.openxmlformats.org/drawingml/2006/main" xmlns:p="http://schemas.openxmlformats.org/presentationml/2006/main" xmlns:r="http://schemas.openxmlformats.org/officeDocument/2006/relationships">
+  <p:cSld>
+    <p:spTree>
+      <p:nvGrpSpPr>
+        <p:cNvPr id="1" name=""/>
+        <p:cNvGrpSpPr/>
+        <p:nvPr/>
+      </p:nvGrpSpPr>
+      <p:grpSpPr/>
+      <p:sp>
+        <p:nvSpPr>
+          <p:cNvPr id="2" name="TextBox 1"/>
+          <p:cNvSpPr txBox="1"/>
+          <p:nvPr/>
+        </p:nvSpPr>
+        <p:spPr>
+          <a:xfrm>
+            <a:off x="548640" y="411480"/>
+            <a:ext cx="11064240" cy="777240"/>
+          </a:xfrm>
+          <a:prstGeom prst="rect">
+            <a:avLst/>
+          </a:prstGeom>
+          <a:noFill/>
+        </p:spPr>
+        <p:txBody>
+          <a:bodyPr wrap="square">
+            <a:noAutofit/>
+          </a:bodyPr>
+          <a:lstStyle/>
+          <a:p>
+            <a:pPr>
+              <a:lnSpc>
+                <a:spcPts val="2200"/>
+              </a:lnSpc>
+            </a:pPr>
+            <a:r>
+              <a:rPr sz="2800" b="1">
+                <a:solidFill>
+                  <a:srgbClr val="1A1A2E"/>
+                </a:solidFill>
+                <a:latin typeface="Calibri"/>
+              </a:rPr>
+              <a:t>Pseudocode</a:t>
+            </a:r>
+          </a:p>
+        </p:txBody>
+      </p:sp>
+      <p:sp>
+        <p:nvSpPr>
+          <p:cNvPr id="3" name="TextBox 2"/>
+          <p:cNvSpPr txBox="1"/>
+          <p:nvPr/>
+        </p:nvSpPr>
+        <p:spPr>
+          <a:xfrm>
+            <a:off x="548640" y="1234440"/>
+            <a:ext cx="11064240" cy="4937760"/>
+          </a:xfrm>
+          <a:prstGeom prst="rect">
+            <a:avLst/>
+          </a:prstGeom>
+          <a:noFill/>
+        </p:spPr>
+        <p:txBody>
+          <a:bodyPr wrap="square">
+            <a:noAutofit/>
+          </a:bodyPr>
+          <a:lstStyle/>
           <a:p>
             <a:pPr lvl="0" marL="457200" indent="-228600">
               <a:buFont typeface="Calibri"/>
@@ -4819,7 +5644,95 @@
                 </a:solidFill>
                 <a:latin typeface="Calibri"/>
               </a:rPr>
-              <a:t>&lt;!-- algorithm-walkthrough --&gt;</a:t>
+              <a:t>Pseudocode is the written sketch of the algorithm before you code it</a:t>
+            </a:r>
+          </a:p>
+          <a:p>
+            <a:pPr lvl="0" marL="457200" indent="-228600">
+              <a:buFont typeface="Calibri"/>
+              <a:spcAft>
+                <a:spcPts val="1000"/>
+              </a:spcAft>
+              <a:buSzPct val="100000"/>
+              <a:buChar char="•"/>
+              <a:lnSpc>
+                <a:spcPts val="2200"/>
+              </a:lnSpc>
+            </a:pPr>
+            <a:r>
+              <a:rPr sz="2000" b="0">
+                <a:solidFill>
+                  <a:srgbClr val="333333"/>
+                </a:solidFill>
+                <a:latin typeface="Calibri"/>
+              </a:rPr>
+              <a:t>For this module the sketch is the site and row model itself</a:t>
+            </a:r>
+          </a:p>
+          <a:p>
+            <a:pPr lvl="0" marL="457200" indent="-228600">
+              <a:buFont typeface="Calibri"/>
+              <a:spcAft>
+                <a:spcPts val="1000"/>
+              </a:spcAft>
+              <a:buSzPct val="100000"/>
+              <a:buChar char="•"/>
+              <a:lnSpc>
+                <a:spcPts val="2200"/>
+              </a:lnSpc>
+            </a:pPr>
+            <a:r>
+              <a:rPr sz="2000" b="0">
+                <a:solidFill>
+                  <a:srgbClr val="333333"/>
+                </a:solidFill>
+                <a:latin typeface="Calibri"/>
+              </a:rPr>
+              <a:t>Outputs are the rules every legal packing must obey</a:t>
+            </a:r>
+          </a:p>
+          <a:p>
+            <a:pPr lvl="0" marL="457200" indent="-228600">
+              <a:buFont typeface="Calibri"/>
+              <a:spcAft>
+                <a:spcPts val="1000"/>
+              </a:spcAft>
+              <a:buSzPct val="100000"/>
+              <a:buChar char="•"/>
+              <a:lnSpc>
+                <a:spcPts val="2200"/>
+              </a:lnSpc>
+            </a:pPr>
+            <a:r>
+              <a:rPr sz="2000" b="0">
+                <a:solidFill>
+                  <a:srgbClr val="333333"/>
+                </a:solidFill>
+                <a:latin typeface="Calibri"/>
+              </a:rPr>
+              <a:t>Open this module's examples file and find the Pseudocode section</a:t>
+            </a:r>
+          </a:p>
+          <a:p>
+            <a:pPr lvl="0" marL="457200" indent="-228600">
+              <a:buFont typeface="Calibri"/>
+              <a:spcAft>
+                <a:spcPts val="1000"/>
+              </a:spcAft>
+              <a:buSzPct val="100000"/>
+              <a:buChar char="•"/>
+              <a:lnSpc>
+                <a:spcPts val="2200"/>
+              </a:lnSpc>
+            </a:pPr>
+            <a:r>
+              <a:rPr sz="2000" b="0">
+                <a:solidFill>
+                  <a:srgbClr val="333333"/>
+                </a:solidFill>
+                <a:latin typeface="Calibri"/>
+              </a:rPr>
+              <a:t>That written sketch is what you implement on the implement track and what the browser</a:t>
             </a:r>
           </a:p>
         </p:txBody>
@@ -4871,7 +5784,468 @@
 </p:sld>
 </file>
 
-<file path=ppt/slides/slide3.xml><?xml version="1.0" encoding="utf-8"?>
+<file path=ppt/slides/slide4.xml><?xml version="1.0" encoding="utf-8"?>
+<p:sld xmlns:a="http://schemas.openxmlformats.org/drawingml/2006/main" xmlns:p="http://schemas.openxmlformats.org/presentationml/2006/main" xmlns:r="http://schemas.openxmlformats.org/officeDocument/2006/relationships">
+  <p:cSld>
+    <p:spTree>
+      <p:nvGrpSpPr>
+        <p:cNvPr id="1" name=""/>
+        <p:cNvGrpSpPr/>
+        <p:nvPr/>
+      </p:nvGrpSpPr>
+      <p:grpSpPr/>
+      <p:sp>
+        <p:nvSpPr>
+          <p:cNvPr id="2" name="TextBox 1"/>
+          <p:cNvSpPr txBox="1"/>
+          <p:nvPr/>
+        </p:nvSpPr>
+        <p:spPr>
+          <a:xfrm>
+            <a:off x="548640" y="411480"/>
+            <a:ext cx="11064240" cy="777240"/>
+          </a:xfrm>
+          <a:prstGeom prst="rect">
+            <a:avLst/>
+          </a:prstGeom>
+          <a:noFill/>
+        </p:spPr>
+        <p:txBody>
+          <a:bodyPr wrap="square">
+            <a:noAutofit/>
+          </a:bodyPr>
+          <a:lstStyle/>
+          <a:p>
+            <a:pPr>
+              <a:lnSpc>
+                <a:spcPts val="2200"/>
+              </a:lnSpc>
+            </a:pPr>
+            <a:r>
+              <a:rPr sz="2800" b="1">
+                <a:solidFill>
+                  <a:srgbClr val="1A1A2E"/>
+                </a:solidFill>
+                <a:latin typeface="Calibri"/>
+              </a:rPr>
+              <a:t>Algorithm sketch</a:t>
+            </a:r>
+          </a:p>
+        </p:txBody>
+      </p:sp>
+      <p:sp>
+        <p:nvSpPr>
+          <p:cNvPr id="3" name="TextBox 2"/>
+          <p:cNvSpPr txBox="1"/>
+          <p:nvPr/>
+        </p:nvSpPr>
+        <p:spPr>
+          <a:xfrm>
+            <a:off x="548640" y="1234440"/>
+            <a:ext cx="11064240" cy="4937760"/>
+          </a:xfrm>
+          <a:prstGeom prst="rect">
+            <a:avLst/>
+          </a:prstGeom>
+          <a:noFill/>
+        </p:spPr>
+        <p:txBody>
+          <a:bodyPr wrap="square">
+            <a:noAutofit/>
+          </a:bodyPr>
+          <a:lstStyle/>
+          <a:p>
+            <a:pPr lvl="0" marL="457200" indent="-228600">
+              <a:buFont typeface="Calibri"/>
+              <a:spcAft>
+                <a:spcPts val="1000"/>
+              </a:spcAft>
+              <a:buSzPct val="100000"/>
+              <a:buChar char="•"/>
+              <a:lnSpc>
+                <a:spcPts val="2200"/>
+              </a:lnSpc>
+            </a:pPr>
+            <a:r>
+              <a:rPr sz="2000" b="0">
+                <a:solidFill>
+                  <a:srgbClr val="333333"/>
+                </a:solidFill>
+                <a:latin typeface="Calibri"/>
+              </a:rPr>
+              <a:t>Read the sketch as a contract</a:t>
+            </a:r>
+          </a:p>
+          <a:p>
+            <a:pPr lvl="0" marL="457200" indent="-228600">
+              <a:buFont typeface="Calibri"/>
+              <a:spcAft>
+                <a:spcPts val="1000"/>
+              </a:spcAft>
+              <a:buSzPct val="100000"/>
+              <a:buChar char="•"/>
+              <a:lnSpc>
+                <a:spcPts val="2200"/>
+              </a:lnSpc>
+            </a:pPr>
+            <a:r>
+              <a:rPr sz="2000" b="0">
+                <a:solidFill>
+                  <a:srgbClr val="333333"/>
+                </a:solidFill>
+                <a:latin typeface="Calibri"/>
+              </a:rPr>
+              <a:t>Every cell lower-left sits on a site and a row bottom</a:t>
+            </a:r>
+          </a:p>
+          <a:p>
+            <a:pPr lvl="0" marL="457200" indent="-228600">
+              <a:buFont typeface="Calibri"/>
+              <a:spcAft>
+                <a:spcPts val="1000"/>
+              </a:spcAft>
+              <a:buSzPct val="100000"/>
+              <a:buChar char="•"/>
+              <a:lnSpc>
+                <a:spcPts val="2200"/>
+              </a:lnSpc>
+            </a:pPr>
+            <a:r>
+              <a:rPr sz="2000" b="0">
+                <a:solidFill>
+                  <a:srgbClr val="333333"/>
+                </a:solidFill>
+                <a:latin typeface="Calibri"/>
+              </a:rPr>
+              <a:t>Width tells how many consecutive sites the rectangle covers</a:t>
+            </a:r>
+          </a:p>
+          <a:p>
+            <a:pPr lvl="0" marL="457200" indent="-228600">
+              <a:buFont typeface="Calibri"/>
+              <a:spcAft>
+                <a:spcPts val="1000"/>
+              </a:spcAft>
+              <a:buSzPct val="100000"/>
+              <a:buChar char="•"/>
+              <a:lnSpc>
+                <a:spcPts val="2200"/>
+              </a:lnSpc>
+            </a:pPr>
+            <a:r>
+              <a:rPr sz="2000" b="0">
+                <a:solidFill>
+                  <a:srgbClr val="333333"/>
+                </a:solidFill>
+                <a:latin typeface="Calibri"/>
+              </a:rPr>
+              <a:t>Our teaching chip is twelve by six with three rows</a:t>
+            </a:r>
+          </a:p>
+        </p:txBody>
+      </p:sp>
+      <p:sp>
+        <p:nvSpPr>
+          <p:cNvPr id="4" name="TextBox 3"/>
+          <p:cNvSpPr txBox="1"/>
+          <p:nvPr/>
+        </p:nvSpPr>
+        <p:spPr>
+          <a:xfrm>
+            <a:off x="548640" y="6355080"/>
+            <a:ext cx="11064240" cy="320040"/>
+          </a:xfrm>
+          <a:prstGeom prst="rect">
+            <a:avLst/>
+          </a:prstGeom>
+          <a:noFill/>
+        </p:spPr>
+        <p:txBody>
+          <a:bodyPr wrap="square">
+            <a:noAutofit/>
+          </a:bodyPr>
+          <a:lstStyle/>
+          <a:p>
+            <a:pPr algn="r">
+              <a:lnSpc>
+                <a:spcPts val="2200"/>
+              </a:lnSpc>
+              <a:defRPr sz="1000" b="0">
+                <a:solidFill>
+                  <a:srgbClr val="666666"/>
+                </a:solidFill>
+                <a:latin typeface="Calibri"/>
+              </a:defRPr>
+            </a:pPr>
+            <a:r>
+              <a:t>learn_legalization — 01 site row model</a:t>
+            </a:r>
+          </a:p>
+        </p:txBody>
+      </p:sp>
+    </p:spTree>
+  </p:cSld>
+  <p:clrMapOvr>
+    <a:masterClrMapping/>
+  </p:clrMapOvr>
+</p:sld>
+</file>
+
+<file path=ppt/slides/slide5.xml><?xml version="1.0" encoding="utf-8"?>
+<p:sld xmlns:a="http://schemas.openxmlformats.org/drawingml/2006/main" xmlns:p="http://schemas.openxmlformats.org/presentationml/2006/main" xmlns:r="http://schemas.openxmlformats.org/officeDocument/2006/relationships">
+  <p:cSld>
+    <p:spTree>
+      <p:nvGrpSpPr>
+        <p:cNvPr id="1" name=""/>
+        <p:cNvGrpSpPr/>
+        <p:nvPr/>
+      </p:nvGrpSpPr>
+      <p:grpSpPr/>
+      <p:sp>
+        <p:nvSpPr>
+          <p:cNvPr id="2" name="TextBox 1"/>
+          <p:cNvSpPr txBox="1"/>
+          <p:nvPr/>
+        </p:nvSpPr>
+        <p:spPr>
+          <a:xfrm>
+            <a:off x="548640" y="411480"/>
+            <a:ext cx="11064240" cy="777240"/>
+          </a:xfrm>
+          <a:prstGeom prst="rect">
+            <a:avLst/>
+          </a:prstGeom>
+          <a:noFill/>
+        </p:spPr>
+        <p:txBody>
+          <a:bodyPr wrap="square">
+            <a:noAutofit/>
+          </a:bodyPr>
+          <a:lstStyle/>
+          <a:p>
+            <a:pPr>
+              <a:lnSpc>
+                <a:spcPts val="2200"/>
+              </a:lnSpc>
+            </a:pPr>
+            <a:r>
+              <a:rPr sz="2800" b="1">
+                <a:solidFill>
+                  <a:srgbClr val="1A1A2E"/>
+                </a:solidFill>
+                <a:latin typeface="Calibri"/>
+              </a:rPr>
+              <a:t>Algorithm sketch — try these</a:t>
+            </a:r>
+          </a:p>
+        </p:txBody>
+      </p:sp>
+      <p:sp>
+        <p:nvSpPr>
+          <p:cNvPr id="3" name="TextBox 2"/>
+          <p:cNvSpPr txBox="1"/>
+          <p:nvPr/>
+        </p:nvSpPr>
+        <p:spPr>
+          <a:xfrm>
+            <a:off x="548640" y="1143000"/>
+            <a:ext cx="11064240" cy="5029200"/>
+          </a:xfrm>
+          <a:prstGeom prst="rect">
+            <a:avLst/>
+          </a:prstGeom>
+          <a:solidFill>
+            <a:srgbClr val="F4F4F4"/>
+          </a:solidFill>
+        </p:spPr>
+        <p:txBody>
+          <a:bodyPr wrap="square">
+            <a:noAutofit/>
+          </a:bodyPr>
+          <a:lstStyle/>
+          <a:p>
+            <a:pPr>
+              <a:lnSpc>
+                <a:spcPts val="2200"/>
+              </a:lnSpc>
+              <a:spcAft>
+                <a:spcPts val="400"/>
+              </a:spcAft>
+            </a:pPr>
+            <a:r>
+              <a:rPr sz="2000" b="0">
+                <a:solidFill>
+                  <a:srgbClr val="333333"/>
+                </a:solidFill>
+                <a:latin typeface="Consolas"/>
+              </a:rPr>
+              <a:t>INPUT: chip W×H, siteW, rowH, rows Y[], widths w[c]</a:t>
+            </a:r>
+          </a:p>
+          <a:p>
+            <a:pPr>
+              <a:lnSpc>
+                <a:spcPts val="2200"/>
+              </a:lnSpc>
+              <a:spcAft>
+                <a:spcPts val="400"/>
+              </a:spcAft>
+            </a:pPr>
+            <a:r>
+              <a:rPr sz="2000" b="0">
+                <a:solidFill>
+                  <a:srgbClr val="333333"/>
+                </a:solidFill>
+                <a:latin typeface="Consolas"/>
+              </a:rPr>
+              <a:t>OUTPUT: legal coordinate rules</a:t>
+            </a:r>
+          </a:p>
+          <a:p>
+            <a:pPr>
+              <a:lnSpc>
+                <a:spcPts val="2200"/>
+              </a:lnSpc>
+              <a:spcAft>
+                <a:spcPts val="400"/>
+              </a:spcAft>
+            </a:pPr>
+            <a:r>
+              <a:rPr sz="2000" b="0">
+                <a:solidFill>
+                  <a:srgbClr val="333333"/>
+                </a:solidFill>
+                <a:latin typeface="Consolas"/>
+              </a:rPr>
+              <a:t>for each cell c:</a:t>
+            </a:r>
+          </a:p>
+          <a:p>
+            <a:pPr>
+              <a:lnSpc>
+                <a:spcPts val="2200"/>
+              </a:lnSpc>
+              <a:spcAft>
+                <a:spcPts val="400"/>
+              </a:spcAft>
+            </a:pPr>
+            <a:r>
+              <a:rPr sz="2000" b="0">
+                <a:solidFill>
+                  <a:srgbClr val="333333"/>
+                </a:solidFill>
+                <a:latin typeface="Consolas"/>
+              </a:rPr>
+              <a:t>  x multiple of siteW; y in Y[]</a:t>
+            </a:r>
+          </a:p>
+          <a:p>
+            <a:pPr>
+              <a:lnSpc>
+                <a:spcPts val="2200"/>
+              </a:lnSpc>
+              <a:spcAft>
+                <a:spcPts val="400"/>
+              </a:spcAft>
+            </a:pPr>
+            <a:r>
+              <a:rPr sz="2000" b="0">
+                <a:solidFill>
+                  <a:srgbClr val="333333"/>
+                </a:solidFill>
+                <a:latin typeface="Consolas"/>
+              </a:rPr>
+              <a:t>  occupies [x, x+w[c]) × [y, y+rowH)</a:t>
+            </a:r>
+          </a:p>
+          <a:p>
+            <a:pPr>
+              <a:lnSpc>
+                <a:spcPts val="2200"/>
+              </a:lnSpc>
+              <a:spcAft>
+                <a:spcPts val="400"/>
+              </a:spcAft>
+            </a:pPr>
+            <a:r>
+              <a:rPr sz="2000" b="0">
+                <a:solidFill>
+                  <a:srgbClr val="333333"/>
+                </a:solidFill>
+                <a:latin typeface="Consolas"/>
+              </a:rPr>
+              <a:t>GOLDEN: W=12 H=6 siteW=1 rowH=2 Y={0,2,4}</a:t>
+            </a:r>
+          </a:p>
+          <a:p>
+            <a:pPr>
+              <a:lnSpc>
+                <a:spcPts val="2200"/>
+              </a:lnSpc>
+              <a:spcAft>
+                <a:spcPts val="400"/>
+              </a:spcAft>
+            </a:pPr>
+            <a:r>
+              <a:rPr sz="2000" b="0">
+                <a:solidFill>
+                  <a:srgbClr val="333333"/>
+                </a:solidFill>
+                <a:latin typeface="Consolas"/>
+              </a:rPr>
+              <a:t>widths A–D=2 E–F=1 (total 10 ≤ 12)</a:t>
+            </a:r>
+          </a:p>
+        </p:txBody>
+      </p:sp>
+      <p:sp>
+        <p:nvSpPr>
+          <p:cNvPr id="4" name="TextBox 3"/>
+          <p:cNvSpPr txBox="1"/>
+          <p:nvPr/>
+        </p:nvSpPr>
+        <p:spPr>
+          <a:xfrm>
+            <a:off x="548640" y="6355080"/>
+            <a:ext cx="11064240" cy="320040"/>
+          </a:xfrm>
+          <a:prstGeom prst="rect">
+            <a:avLst/>
+          </a:prstGeom>
+          <a:noFill/>
+        </p:spPr>
+        <p:txBody>
+          <a:bodyPr wrap="square">
+            <a:noAutofit/>
+          </a:bodyPr>
+          <a:lstStyle/>
+          <a:p>
+            <a:pPr algn="r">
+              <a:lnSpc>
+                <a:spcPts val="2200"/>
+              </a:lnSpc>
+              <a:defRPr sz="1000" b="0">
+                <a:solidFill>
+                  <a:srgbClr val="666666"/>
+                </a:solidFill>
+                <a:latin typeface="Calibri"/>
+              </a:defRPr>
+            </a:pPr>
+            <a:r>
+              <a:t>learn_legalization — 01 site row model</a:t>
+            </a:r>
+          </a:p>
+        </p:txBody>
+      </p:sp>
+    </p:spTree>
+  </p:cSld>
+  <p:clrMapOvr>
+    <a:masterClrMapping/>
+  </p:clrMapOvr>
+</p:sld>
+</file>
+
+<file path=ppt/slides/slide6.xml><?xml version="1.0" encoding="utf-8"?>
 <p:sld xmlns:a="http://schemas.openxmlformats.org/drawingml/2006/main" xmlns:p="http://schemas.openxmlformats.org/presentationml/2006/main" xmlns:r="http://schemas.openxmlformats.org/officeDocument/2006/relationships">
   <p:cSld>
     <p:spTree>
@@ -5030,7 +6404,7 @@
 </p:sld>
 </file>
 
-<file path=ppt/slides/slide4.xml><?xml version="1.0" encoding="utf-8"?>
+<file path=ppt/slides/slide7.xml><?xml version="1.0" encoding="utf-8"?>
 <p:sld xmlns:a="http://schemas.openxmlformats.org/drawingml/2006/main" xmlns:p="http://schemas.openxmlformats.org/presentationml/2006/main" xmlns:r="http://schemas.openxmlformats.org/officeDocument/2006/relationships">
   <p:cSld>
     <p:spTree>
@@ -5189,7 +6563,7 @@
 </p:sld>
 </file>
 
-<file path=ppt/slides/slide5.xml><?xml version="1.0" encoding="utf-8"?>
+<file path=ppt/slides/slide8.xml><?xml version="1.0" encoding="utf-8"?>
 <p:sld xmlns:a="http://schemas.openxmlformats.org/drawingml/2006/main" xmlns:p="http://schemas.openxmlformats.org/presentationml/2006/main" xmlns:r="http://schemas.openxmlformats.org/officeDocument/2006/relationships">
   <p:cSld>
     <p:spTree>
@@ -5348,7 +6722,7 @@
 </p:sld>
 </file>
 
-<file path=ppt/slides/slide6.xml><?xml version="1.0" encoding="utf-8"?>
+<file path=ppt/slides/slide9.xml><?xml version="1.0" encoding="utf-8"?>
 <p:sld xmlns:a="http://schemas.openxmlformats.org/drawingml/2006/main" xmlns:p="http://schemas.openxmlformats.org/presentationml/2006/main" xmlns:r="http://schemas.openxmlformats.org/officeDocument/2006/relationships">
   <p:cSld>
     <p:spTree>
@@ -5463,553 +6837,6 @@
       <p:sp>
         <p:nvSpPr>
           <p:cNvPr id="5" name="TextBox 4"/>
-          <p:cNvSpPr txBox="1"/>
-          <p:nvPr/>
-        </p:nvSpPr>
-        <p:spPr>
-          <a:xfrm>
-            <a:off x="548640" y="6355080"/>
-            <a:ext cx="11064240" cy="320040"/>
-          </a:xfrm>
-          <a:prstGeom prst="rect">
-            <a:avLst/>
-          </a:prstGeom>
-          <a:noFill/>
-        </p:spPr>
-        <p:txBody>
-          <a:bodyPr wrap="square">
-            <a:noAutofit/>
-          </a:bodyPr>
-          <a:lstStyle/>
-          <a:p>
-            <a:pPr algn="r">
-              <a:lnSpc>
-                <a:spcPts val="2200"/>
-              </a:lnSpc>
-              <a:defRPr sz="1000" b="0">
-                <a:solidFill>
-                  <a:srgbClr val="666666"/>
-                </a:solidFill>
-                <a:latin typeface="Calibri"/>
-              </a:defRPr>
-            </a:pPr>
-            <a:r>
-              <a:t>learn_legalization — 01 site row model</a:t>
-            </a:r>
-          </a:p>
-        </p:txBody>
-      </p:sp>
-    </p:spTree>
-  </p:cSld>
-  <p:clrMapOvr>
-    <a:masterClrMapping/>
-  </p:clrMapOvr>
-</p:sld>
-</file>
-
-<file path=ppt/slides/slide7.xml><?xml version="1.0" encoding="utf-8"?>
-<p:sld xmlns:a="http://schemas.openxmlformats.org/drawingml/2006/main" xmlns:p="http://schemas.openxmlformats.org/presentationml/2006/main" xmlns:r="http://schemas.openxmlformats.org/officeDocument/2006/relationships">
-  <p:cSld>
-    <p:spTree>
-      <p:nvGrpSpPr>
-        <p:cNvPr id="1" name=""/>
-        <p:cNvGrpSpPr/>
-        <p:nvPr/>
-      </p:nvGrpSpPr>
-      <p:grpSpPr/>
-      <p:sp>
-        <p:nvSpPr>
-          <p:cNvPr id="2" name="TextBox 1"/>
-          <p:cNvSpPr txBox="1"/>
-          <p:nvPr/>
-        </p:nvSpPr>
-        <p:spPr>
-          <a:xfrm>
-            <a:off x="548640" y="411480"/>
-            <a:ext cx="11064240" cy="777240"/>
-          </a:xfrm>
-          <a:prstGeom prst="rect">
-            <a:avLst/>
-          </a:prstGeom>
-          <a:noFill/>
-        </p:spPr>
-        <p:txBody>
-          <a:bodyPr wrap="square">
-            <a:noAutofit/>
-          </a:bodyPr>
-          <a:lstStyle/>
-          <a:p>
-            <a:pPr>
-              <a:lnSpc>
-                <a:spcPts val="2200"/>
-              </a:lnSpc>
-            </a:pPr>
-            <a:r>
-              <a:rPr sz="2800" b="1">
-                <a:solidFill>
-                  <a:srgbClr val="1A1A2E"/>
-                </a:solidFill>
-                <a:latin typeface="Calibri"/>
-              </a:rPr>
-              <a:t>Contrast: illegal overlap stack</a:t>
-            </a:r>
-          </a:p>
-        </p:txBody>
-      </p:sp>
-      <p:pic>
-        <p:nvPicPr>
-          <p:cNvPr id="3" name="Picture 2" descr="05-overlap-contrast.png"/>
-          <p:cNvPicPr>
-            <a:picLocks noChangeAspect="1"/>
-          </p:cNvPicPr>
-          <p:nvPr/>
-        </p:nvPicPr>
-        <p:blipFill>
-          <a:blip r:embed="rId2"/>
-          <a:stretch>
-            <a:fillRect/>
-          </a:stretch>
-        </p:blipFill>
-        <p:spPr>
-          <a:xfrm>
-            <a:off x="548640" y="1143000"/>
-            <a:ext cx="9404113" cy="4572000"/>
-          </a:xfrm>
-          <a:prstGeom prst="rect">
-            <a:avLst/>
-          </a:prstGeom>
-        </p:spPr>
-      </p:pic>
-      <p:sp>
-        <p:nvSpPr>
-          <p:cNvPr id="4" name="TextBox 3"/>
-          <p:cNvSpPr txBox="1"/>
-          <p:nvPr/>
-        </p:nvSpPr>
-        <p:spPr>
-          <a:xfrm>
-            <a:off x="548640" y="5897880"/>
-            <a:ext cx="11064240" cy="411480"/>
-          </a:xfrm>
-          <a:prstGeom prst="rect">
-            <a:avLst/>
-          </a:prstGeom>
-          <a:noFill/>
-        </p:spPr>
-        <p:txBody>
-          <a:bodyPr wrap="square">
-            <a:noAutofit/>
-          </a:bodyPr>
-          <a:lstStyle/>
-          <a:p>
-            <a:pPr>
-              <a:lnSpc>
-                <a:spcPts val="2200"/>
-              </a:lnSpc>
-            </a:pPr>
-            <a:r>
-              <a:rPr sz="1200" b="0">
-                <a:solidFill>
-                  <a:srgbClr val="333333"/>
-                </a:solidFill>
-                <a:latin typeface="Calibri"/>
-              </a:rPr>
-              <a:t>Contrast: illegal overlap stack</a:t>
-            </a:r>
-          </a:p>
-        </p:txBody>
-      </p:sp>
-      <p:sp>
-        <p:nvSpPr>
-          <p:cNvPr id="5" name="TextBox 4"/>
-          <p:cNvSpPr txBox="1"/>
-          <p:nvPr/>
-        </p:nvSpPr>
-        <p:spPr>
-          <a:xfrm>
-            <a:off x="548640" y="6355080"/>
-            <a:ext cx="11064240" cy="320040"/>
-          </a:xfrm>
-          <a:prstGeom prst="rect">
-            <a:avLst/>
-          </a:prstGeom>
-          <a:noFill/>
-        </p:spPr>
-        <p:txBody>
-          <a:bodyPr wrap="square">
-            <a:noAutofit/>
-          </a:bodyPr>
-          <a:lstStyle/>
-          <a:p>
-            <a:pPr algn="r">
-              <a:lnSpc>
-                <a:spcPts val="2200"/>
-              </a:lnSpc>
-              <a:defRPr sz="1000" b="0">
-                <a:solidFill>
-                  <a:srgbClr val="666666"/>
-                </a:solidFill>
-                <a:latin typeface="Calibri"/>
-              </a:defRPr>
-            </a:pPr>
-            <a:r>
-              <a:t>learn_legalization — 01 site row model</a:t>
-            </a:r>
-          </a:p>
-        </p:txBody>
-      </p:sp>
-    </p:spTree>
-  </p:cSld>
-  <p:clrMapOvr>
-    <a:masterClrMapping/>
-  </p:clrMapOvr>
-</p:sld>
-</file>
-
-<file path=ppt/slides/slide8.xml><?xml version="1.0" encoding="utf-8"?>
-<p:sld xmlns:a="http://schemas.openxmlformats.org/drawingml/2006/main" xmlns:p="http://schemas.openxmlformats.org/presentationml/2006/main" xmlns:r="http://schemas.openxmlformats.org/officeDocument/2006/relationships">
-  <p:cSld>
-    <p:spTree>
-      <p:nvGrpSpPr>
-        <p:cNvPr id="1" name=""/>
-        <p:cNvGrpSpPr/>
-        <p:nvPr/>
-      </p:nvGrpSpPr>
-      <p:grpSpPr/>
-      <p:sp>
-        <p:nvSpPr>
-          <p:cNvPr id="2" name="TextBox 1"/>
-          <p:cNvSpPr txBox="1"/>
-          <p:nvPr/>
-        </p:nvSpPr>
-        <p:spPr>
-          <a:xfrm>
-            <a:off x="548640" y="411480"/>
-            <a:ext cx="11064240" cy="777240"/>
-          </a:xfrm>
-          <a:prstGeom prst="rect">
-            <a:avLst/>
-          </a:prstGeom>
-          <a:noFill/>
-        </p:spPr>
-        <p:txBody>
-          <a:bodyPr wrap="square">
-            <a:noAutofit/>
-          </a:bodyPr>
-          <a:lstStyle/>
-          <a:p>
-            <a:pPr>
-              <a:lnSpc>
-                <a:spcPts val="2200"/>
-              </a:lnSpc>
-            </a:pPr>
-            <a:r>
-              <a:rPr sz="2800" b="1">
-                <a:solidFill>
-                  <a:srgbClr val="1A1A2E"/>
-                </a:solidFill>
-                <a:latin typeface="Calibri"/>
-              </a:rPr>
-              <a:t>Browser lab track</a:t>
-            </a:r>
-          </a:p>
-        </p:txBody>
-      </p:sp>
-      <p:sp>
-        <p:nvSpPr>
-          <p:cNvPr id="3" name="TextBox 2"/>
-          <p:cNvSpPr txBox="1"/>
-          <p:nvPr/>
-        </p:nvSpPr>
-        <p:spPr>
-          <a:xfrm>
-            <a:off x="548640" y="1234440"/>
-            <a:ext cx="11064240" cy="4937760"/>
-          </a:xfrm>
-          <a:prstGeom prst="rect">
-            <a:avLst/>
-          </a:prstGeom>
-          <a:noFill/>
-        </p:spPr>
-        <p:txBody>
-          <a:bodyPr wrap="square">
-            <a:noAutofit/>
-          </a:bodyPr>
-          <a:lstStyle/>
-          <a:p>
-            <a:pPr lvl="0" marL="457200" indent="-228600">
-              <a:buFont typeface="Calibri"/>
-              <a:spcAft>
-                <a:spcPts val="1000"/>
-              </a:spcAft>
-              <a:buSzPct val="100000"/>
-              <a:buChar char="•"/>
-              <a:lnSpc>
-                <a:spcPts val="2200"/>
-              </a:lnSpc>
-            </a:pPr>
-            <a:r>
-              <a:rPr sz="2000" b="0">
-                <a:solidFill>
-                  <a:srgbClr val="333333"/>
-                </a:solidFill>
-                <a:latin typeface="Calibri"/>
-              </a:rPr>
-              <a:t>In the browser lab track, open the </a:t>
-            </a:r>
-            <a:r>
-              <a:rPr sz="2000" b="1">
-                <a:solidFill>
-                  <a:srgbClr val="333333"/>
-                </a:solidFill>
-                <a:latin typeface="Calibri"/>
-              </a:rPr>
-              <a:t>site-row-model</a:t>
-            </a:r>
-            <a:r>
-              <a:rPr sz="2000" b="0">
-                <a:solidFill>
-                  <a:srgbClr val="333333"/>
-                </a:solidFill>
-                <a:latin typeface="Calibri"/>
-              </a:rPr>
-              <a:t> lab from the tools shelf</a:t>
-            </a:r>
-          </a:p>
-          <a:p>
-            <a:pPr lvl="0" marL="457200" indent="-228600">
-              <a:buFont typeface="Calibri"/>
-              <a:spcAft>
-                <a:spcPts val="1000"/>
-              </a:spcAft>
-              <a:buSzPct val="100000"/>
-              <a:buChar char="•"/>
-              <a:lnSpc>
-                <a:spcPts val="2200"/>
-              </a:lnSpc>
-            </a:pPr>
-            <a:r>
-              <a:rPr sz="2000" b="0">
-                <a:solidFill>
-                  <a:srgbClr val="333333"/>
-                </a:solidFill>
-                <a:latin typeface="Calibri"/>
-              </a:rPr>
-              <a:t>Load the overlap or float starter, run the legalizer once</a:t>
-            </a:r>
-          </a:p>
-          <a:p>
-            <a:pPr lvl="0" marL="457200" indent="-228600">
-              <a:buFont typeface="Calibri"/>
-              <a:spcAft>
-                <a:spcPts val="1000"/>
-              </a:spcAft>
-              <a:buSzPct val="100000"/>
-              <a:buChar char="•"/>
-              <a:lnSpc>
-                <a:spcPts val="2200"/>
-              </a:lnSpc>
-            </a:pPr>
-            <a:r>
-              <a:rPr sz="2000" b="0">
-                <a:solidFill>
-                  <a:srgbClr val="333333"/>
-                </a:solidFill>
-                <a:latin typeface="Calibri"/>
-              </a:rPr>
-              <a:t>Work the challenges that lock the goldens</a:t>
-            </a:r>
-          </a:p>
-        </p:txBody>
-      </p:sp>
-      <p:sp>
-        <p:nvSpPr>
-          <p:cNvPr id="4" name="TextBox 3"/>
-          <p:cNvSpPr txBox="1"/>
-          <p:nvPr/>
-        </p:nvSpPr>
-        <p:spPr>
-          <a:xfrm>
-            <a:off x="548640" y="6355080"/>
-            <a:ext cx="11064240" cy="320040"/>
-          </a:xfrm>
-          <a:prstGeom prst="rect">
-            <a:avLst/>
-          </a:prstGeom>
-          <a:noFill/>
-        </p:spPr>
-        <p:txBody>
-          <a:bodyPr wrap="square">
-            <a:noAutofit/>
-          </a:bodyPr>
-          <a:lstStyle/>
-          <a:p>
-            <a:pPr algn="r">
-              <a:lnSpc>
-                <a:spcPts val="2200"/>
-              </a:lnSpc>
-              <a:defRPr sz="1000" b="0">
-                <a:solidFill>
-                  <a:srgbClr val="666666"/>
-                </a:solidFill>
-                <a:latin typeface="Calibri"/>
-              </a:defRPr>
-            </a:pPr>
-            <a:r>
-              <a:t>learn_legalization — 01 site row model</a:t>
-            </a:r>
-          </a:p>
-        </p:txBody>
-      </p:sp>
-    </p:spTree>
-  </p:cSld>
-  <p:clrMapOvr>
-    <a:masterClrMapping/>
-  </p:clrMapOvr>
-</p:sld>
-</file>
-
-<file path=ppt/slides/slide9.xml><?xml version="1.0" encoding="utf-8"?>
-<p:sld xmlns:a="http://schemas.openxmlformats.org/drawingml/2006/main" xmlns:p="http://schemas.openxmlformats.org/presentationml/2006/main" xmlns:r="http://schemas.openxmlformats.org/officeDocument/2006/relationships">
-  <p:cSld>
-    <p:spTree>
-      <p:nvGrpSpPr>
-        <p:cNvPr id="1" name=""/>
-        <p:cNvGrpSpPr/>
-        <p:nvPr/>
-      </p:nvGrpSpPr>
-      <p:grpSpPr/>
-      <p:sp>
-        <p:nvSpPr>
-          <p:cNvPr id="2" name="TextBox 1"/>
-          <p:cNvSpPr txBox="1"/>
-          <p:nvPr/>
-        </p:nvSpPr>
-        <p:spPr>
-          <a:xfrm>
-            <a:off x="548640" y="411480"/>
-            <a:ext cx="11064240" cy="777240"/>
-          </a:xfrm>
-          <a:prstGeom prst="rect">
-            <a:avLst/>
-          </a:prstGeom>
-          <a:noFill/>
-        </p:spPr>
-        <p:txBody>
-          <a:bodyPr wrap="square">
-            <a:noAutofit/>
-          </a:bodyPr>
-          <a:lstStyle/>
-          <a:p>
-            <a:pPr>
-              <a:lnSpc>
-                <a:spcPts val="2200"/>
-              </a:lnSpc>
-            </a:pPr>
-            <a:r>
-              <a:rPr sz="2800" b="1">
-                <a:solidFill>
-                  <a:srgbClr val="1A1A2E"/>
-                </a:solidFill>
-                <a:latin typeface="Calibri"/>
-              </a:rPr>
-              <a:t>Implement track</a:t>
-            </a:r>
-          </a:p>
-        </p:txBody>
-      </p:sp>
-      <p:sp>
-        <p:nvSpPr>
-          <p:cNvPr id="3" name="TextBox 2"/>
-          <p:cNvSpPr txBox="1"/>
-          <p:nvPr/>
-        </p:nvSpPr>
-        <p:spPr>
-          <a:xfrm>
-            <a:off x="548640" y="1234440"/>
-            <a:ext cx="11064240" cy="4937760"/>
-          </a:xfrm>
-          <a:prstGeom prst="rect">
-            <a:avLst/>
-          </a:prstGeom>
-          <a:noFill/>
-        </p:spPr>
-        <p:txBody>
-          <a:bodyPr wrap="square">
-            <a:noAutofit/>
-          </a:bodyPr>
-          <a:lstStyle/>
-          <a:p>
-            <a:pPr lvl="0" marL="457200" indent="-228600">
-              <a:buFont typeface="Calibri"/>
-              <a:spcAft>
-                <a:spcPts val="1000"/>
-              </a:spcAft>
-              <a:buSzPct val="100000"/>
-              <a:buChar char="•"/>
-              <a:lnSpc>
-                <a:spcPts val="2200"/>
-              </a:lnSpc>
-            </a:pPr>
-            <a:r>
-              <a:rPr sz="2000" b="0">
-                <a:solidFill>
-                  <a:srgbClr val="333333"/>
-                </a:solidFill>
-                <a:latin typeface="Calibri"/>
-              </a:rPr>
-              <a:t>In the implement track, open this module's examples and the course `common/` solvers</a:t>
-            </a:r>
-          </a:p>
-          <a:p>
-            <a:pPr lvl="0" marL="457200" indent="-228600">
-              <a:buFont typeface="Calibri"/>
-              <a:spcAft>
-                <a:spcPts val="1000"/>
-              </a:spcAft>
-              <a:buSzPct val="100000"/>
-              <a:buChar char="•"/>
-              <a:lnSpc>
-                <a:spcPts val="2200"/>
-              </a:lnSpc>
-            </a:pPr>
-            <a:r>
-              <a:rPr sz="2000" b="0">
-                <a:solidFill>
-                  <a:srgbClr val="333333"/>
-                </a:solidFill>
-                <a:latin typeface="Calibri"/>
-              </a:rPr>
-              <a:t>Parse `tiny_legal.json`, run the algorithm with deterministic coordinates</a:t>
-            </a:r>
-          </a:p>
-          <a:p>
-            <a:pPr lvl="0" marL="457200" indent="-228600">
-              <a:buFont typeface="Calibri"/>
-              <a:spcAft>
-                <a:spcPts val="1000"/>
-              </a:spcAft>
-              <a:buSzPct val="100000"/>
-              <a:buChar char="•"/>
-              <a:lnSpc>
-                <a:spcPts val="2200"/>
-              </a:lnSpc>
-            </a:pPr>
-            <a:r>
-              <a:rPr sz="2000" b="0">
-                <a:solidFill>
-                  <a:srgbClr val="333333"/>
-                </a:solidFill>
-                <a:latin typeface="Calibri"/>
-              </a:rPr>
-              <a:t>Match the browser goldens before you claim the checklist</a:t>
-            </a:r>
-          </a:p>
-        </p:txBody>
-      </p:sp>
-      <p:sp>
-        <p:nvSpPr>
-          <p:cNvPr id="4" name="TextBox 3"/>
           <p:cNvSpPr txBox="1"/>
           <p:nvPr/>
         </p:nvSpPr>
